--- a/最美的禮物.pptx
+++ b/最美的禮物.pptx
@@ -169,7 +169,7 @@
           <a:lstStyle/>
           <a:p>
             <a:r>
-              <a:rPr lang="en-US" altLang="zh-TW" smtClean="0"/>
+              <a:rPr lang="en-US" altLang="zh-TW"/>
               <a:t>Click to edit Master title style</a:t>
             </a:r>
             <a:endParaRPr lang="zh-TW" altLang="en-US"/>
@@ -288,7 +288,7 @@
           </a:lstStyle>
           <a:p>
             <a:r>
-              <a:rPr lang="en-US" altLang="zh-TW" smtClean="0"/>
+              <a:rPr lang="en-US" altLang="zh-TW"/>
               <a:t>Click to edit Master subtitle style</a:t>
             </a:r>
             <a:endParaRPr lang="zh-TW" altLang="en-US"/>
@@ -312,7 +312,7 @@
           <a:p>
             <a:fld id="{EE40A0B7-CDAD-46BA-BE6C-EFC19534B14B}" type="datetimeFigureOut">
               <a:rPr lang="zh-TW" altLang="en-US" smtClean="0"/>
-              <a:t>2022/12/14</a:t>
+              <a:t>2024/12/15</a:t>
             </a:fld>
             <a:endParaRPr lang="zh-TW" altLang="en-US"/>
           </a:p>
@@ -406,7 +406,7 @@
           <a:lstStyle/>
           <a:p>
             <a:r>
-              <a:rPr lang="en-US" altLang="zh-TW" smtClean="0"/>
+              <a:rPr lang="en-US" altLang="zh-TW"/>
               <a:t>Click to edit Master title style</a:t>
             </a:r>
             <a:endParaRPr lang="zh-TW" altLang="en-US"/>
@@ -430,35 +430,35 @@
           <a:p>
             <a:pPr lvl="0"/>
             <a:r>
-              <a:rPr lang="en-US" altLang="zh-TW" smtClean="0"/>
+              <a:rPr lang="en-US" altLang="zh-TW"/>
               <a:t>Edit Master text styles</a:t>
             </a:r>
           </a:p>
           <a:p>
             <a:pPr lvl="1"/>
             <a:r>
-              <a:rPr lang="en-US" altLang="zh-TW" smtClean="0"/>
+              <a:rPr lang="en-US" altLang="zh-TW"/>
               <a:t>Second level</a:t>
             </a:r>
           </a:p>
           <a:p>
             <a:pPr lvl="2"/>
             <a:r>
-              <a:rPr lang="en-US" altLang="zh-TW" smtClean="0"/>
+              <a:rPr lang="en-US" altLang="zh-TW"/>
               <a:t>Third level</a:t>
             </a:r>
           </a:p>
           <a:p>
             <a:pPr lvl="3"/>
             <a:r>
-              <a:rPr lang="en-US" altLang="zh-TW" smtClean="0"/>
+              <a:rPr lang="en-US" altLang="zh-TW"/>
               <a:t>Fourth level</a:t>
             </a:r>
           </a:p>
           <a:p>
             <a:pPr lvl="4"/>
             <a:r>
-              <a:rPr lang="en-US" altLang="zh-TW" smtClean="0"/>
+              <a:rPr lang="en-US" altLang="zh-TW"/>
               <a:t>Fifth level</a:t>
             </a:r>
             <a:endParaRPr lang="zh-TW" altLang="en-US"/>
@@ -482,7 +482,7 @@
           <a:p>
             <a:fld id="{EE40A0B7-CDAD-46BA-BE6C-EFC19534B14B}" type="datetimeFigureOut">
               <a:rPr lang="zh-TW" altLang="en-US" smtClean="0"/>
-              <a:t>2022/12/14</a:t>
+              <a:t>2024/12/15</a:t>
             </a:fld>
             <a:endParaRPr lang="zh-TW" altLang="en-US"/>
           </a:p>
@@ -581,7 +581,7 @@
           <a:lstStyle/>
           <a:p>
             <a:r>
-              <a:rPr lang="en-US" altLang="zh-TW" smtClean="0"/>
+              <a:rPr lang="en-US" altLang="zh-TW"/>
               <a:t>Click to edit Master title style</a:t>
             </a:r>
             <a:endParaRPr lang="zh-TW" altLang="en-US"/>
@@ -610,35 +610,35 @@
           <a:p>
             <a:pPr lvl="0"/>
             <a:r>
-              <a:rPr lang="en-US" altLang="zh-TW" smtClean="0"/>
+              <a:rPr lang="en-US" altLang="zh-TW"/>
               <a:t>Edit Master text styles</a:t>
             </a:r>
           </a:p>
           <a:p>
             <a:pPr lvl="1"/>
             <a:r>
-              <a:rPr lang="en-US" altLang="zh-TW" smtClean="0"/>
+              <a:rPr lang="en-US" altLang="zh-TW"/>
               <a:t>Second level</a:t>
             </a:r>
           </a:p>
           <a:p>
             <a:pPr lvl="2"/>
             <a:r>
-              <a:rPr lang="en-US" altLang="zh-TW" smtClean="0"/>
+              <a:rPr lang="en-US" altLang="zh-TW"/>
               <a:t>Third level</a:t>
             </a:r>
           </a:p>
           <a:p>
             <a:pPr lvl="3"/>
             <a:r>
-              <a:rPr lang="en-US" altLang="zh-TW" smtClean="0"/>
+              <a:rPr lang="en-US" altLang="zh-TW"/>
               <a:t>Fourth level</a:t>
             </a:r>
           </a:p>
           <a:p>
             <a:pPr lvl="4"/>
             <a:r>
-              <a:rPr lang="en-US" altLang="zh-TW" smtClean="0"/>
+              <a:rPr lang="en-US" altLang="zh-TW"/>
               <a:t>Fifth level</a:t>
             </a:r>
             <a:endParaRPr lang="zh-TW" altLang="en-US"/>
@@ -662,7 +662,7 @@
           <a:p>
             <a:fld id="{EE40A0B7-CDAD-46BA-BE6C-EFC19534B14B}" type="datetimeFigureOut">
               <a:rPr lang="zh-TW" altLang="en-US" smtClean="0"/>
-              <a:t>2022/12/14</a:t>
+              <a:t>2024/12/15</a:t>
             </a:fld>
             <a:endParaRPr lang="zh-TW" altLang="en-US"/>
           </a:p>
@@ -756,7 +756,7 @@
           <a:lstStyle/>
           <a:p>
             <a:r>
-              <a:rPr lang="en-US" altLang="zh-TW" smtClean="0"/>
+              <a:rPr lang="en-US" altLang="zh-TW"/>
               <a:t>Click to edit Master title style</a:t>
             </a:r>
             <a:endParaRPr lang="zh-TW" altLang="en-US"/>
@@ -780,35 +780,35 @@
           <a:p>
             <a:pPr lvl="0"/>
             <a:r>
-              <a:rPr lang="en-US" altLang="zh-TW" smtClean="0"/>
+              <a:rPr lang="en-US" altLang="zh-TW"/>
               <a:t>Edit Master text styles</a:t>
             </a:r>
           </a:p>
           <a:p>
             <a:pPr lvl="1"/>
             <a:r>
-              <a:rPr lang="en-US" altLang="zh-TW" smtClean="0"/>
+              <a:rPr lang="en-US" altLang="zh-TW"/>
               <a:t>Second level</a:t>
             </a:r>
           </a:p>
           <a:p>
             <a:pPr lvl="2"/>
             <a:r>
-              <a:rPr lang="en-US" altLang="zh-TW" smtClean="0"/>
+              <a:rPr lang="en-US" altLang="zh-TW"/>
               <a:t>Third level</a:t>
             </a:r>
           </a:p>
           <a:p>
             <a:pPr lvl="3"/>
             <a:r>
-              <a:rPr lang="en-US" altLang="zh-TW" smtClean="0"/>
+              <a:rPr lang="en-US" altLang="zh-TW"/>
               <a:t>Fourth level</a:t>
             </a:r>
           </a:p>
           <a:p>
             <a:pPr lvl="4"/>
             <a:r>
-              <a:rPr lang="en-US" altLang="zh-TW" smtClean="0"/>
+              <a:rPr lang="en-US" altLang="zh-TW"/>
               <a:t>Fifth level</a:t>
             </a:r>
             <a:endParaRPr lang="zh-TW" altLang="en-US"/>
@@ -832,7 +832,7 @@
           <a:p>
             <a:fld id="{EE40A0B7-CDAD-46BA-BE6C-EFC19534B14B}" type="datetimeFigureOut">
               <a:rPr lang="zh-TW" altLang="en-US" smtClean="0"/>
-              <a:t>2022/12/14</a:t>
+              <a:t>2024/12/15</a:t>
             </a:fld>
             <a:endParaRPr lang="zh-TW" altLang="en-US"/>
           </a:p>
@@ -935,7 +935,7 @@
           </a:lstStyle>
           <a:p>
             <a:r>
-              <a:rPr lang="en-US" altLang="zh-TW" smtClean="0"/>
+              <a:rPr lang="en-US" altLang="zh-TW"/>
               <a:t>Click to edit Master title style</a:t>
             </a:r>
             <a:endParaRPr lang="zh-TW" altLang="en-US"/>
@@ -1055,7 +1055,7 @@
           <a:p>
             <a:pPr lvl="0"/>
             <a:r>
-              <a:rPr lang="en-US" altLang="zh-TW" smtClean="0"/>
+              <a:rPr lang="en-US" altLang="zh-TW"/>
               <a:t>Edit Master text styles</a:t>
             </a:r>
           </a:p>
@@ -1078,7 +1078,7 @@
           <a:p>
             <a:fld id="{EE40A0B7-CDAD-46BA-BE6C-EFC19534B14B}" type="datetimeFigureOut">
               <a:rPr lang="zh-TW" altLang="en-US" smtClean="0"/>
-              <a:t>2022/12/14</a:t>
+              <a:t>2024/12/15</a:t>
             </a:fld>
             <a:endParaRPr lang="zh-TW" altLang="en-US"/>
           </a:p>
@@ -1172,7 +1172,7 @@
           <a:lstStyle/>
           <a:p>
             <a:r>
-              <a:rPr lang="en-US" altLang="zh-TW" smtClean="0"/>
+              <a:rPr lang="en-US" altLang="zh-TW"/>
               <a:t>Click to edit Master title style</a:t>
             </a:r>
             <a:endParaRPr lang="zh-TW" altLang="en-US"/>
@@ -1229,35 +1229,35 @@
           <a:p>
             <a:pPr lvl="0"/>
             <a:r>
-              <a:rPr lang="en-US" altLang="zh-TW" smtClean="0"/>
+              <a:rPr lang="en-US" altLang="zh-TW"/>
               <a:t>Edit Master text styles</a:t>
             </a:r>
           </a:p>
           <a:p>
             <a:pPr lvl="1"/>
             <a:r>
-              <a:rPr lang="en-US" altLang="zh-TW" smtClean="0"/>
+              <a:rPr lang="en-US" altLang="zh-TW"/>
               <a:t>Second level</a:t>
             </a:r>
           </a:p>
           <a:p>
             <a:pPr lvl="2"/>
             <a:r>
-              <a:rPr lang="en-US" altLang="zh-TW" smtClean="0"/>
+              <a:rPr lang="en-US" altLang="zh-TW"/>
               <a:t>Third level</a:t>
             </a:r>
           </a:p>
           <a:p>
             <a:pPr lvl="3"/>
             <a:r>
-              <a:rPr lang="en-US" altLang="zh-TW" smtClean="0"/>
+              <a:rPr lang="en-US" altLang="zh-TW"/>
               <a:t>Fourth level</a:t>
             </a:r>
           </a:p>
           <a:p>
             <a:pPr lvl="4"/>
             <a:r>
-              <a:rPr lang="en-US" altLang="zh-TW" smtClean="0"/>
+              <a:rPr lang="en-US" altLang="zh-TW"/>
               <a:t>Fifth level</a:t>
             </a:r>
             <a:endParaRPr lang="zh-TW" altLang="en-US"/>
@@ -1314,35 +1314,35 @@
           <a:p>
             <a:pPr lvl="0"/>
             <a:r>
-              <a:rPr lang="en-US" altLang="zh-TW" smtClean="0"/>
+              <a:rPr lang="en-US" altLang="zh-TW"/>
               <a:t>Edit Master text styles</a:t>
             </a:r>
           </a:p>
           <a:p>
             <a:pPr lvl="1"/>
             <a:r>
-              <a:rPr lang="en-US" altLang="zh-TW" smtClean="0"/>
+              <a:rPr lang="en-US" altLang="zh-TW"/>
               <a:t>Second level</a:t>
             </a:r>
           </a:p>
           <a:p>
             <a:pPr lvl="2"/>
             <a:r>
-              <a:rPr lang="en-US" altLang="zh-TW" smtClean="0"/>
+              <a:rPr lang="en-US" altLang="zh-TW"/>
               <a:t>Third level</a:t>
             </a:r>
           </a:p>
           <a:p>
             <a:pPr lvl="3"/>
             <a:r>
-              <a:rPr lang="en-US" altLang="zh-TW" smtClean="0"/>
+              <a:rPr lang="en-US" altLang="zh-TW"/>
               <a:t>Fourth level</a:t>
             </a:r>
           </a:p>
           <a:p>
             <a:pPr lvl="4"/>
             <a:r>
-              <a:rPr lang="en-US" altLang="zh-TW" smtClean="0"/>
+              <a:rPr lang="en-US" altLang="zh-TW"/>
               <a:t>Fifth level</a:t>
             </a:r>
             <a:endParaRPr lang="zh-TW" altLang="en-US"/>
@@ -1366,7 +1366,7 @@
           <a:p>
             <a:fld id="{EE40A0B7-CDAD-46BA-BE6C-EFC19534B14B}" type="datetimeFigureOut">
               <a:rPr lang="zh-TW" altLang="en-US" smtClean="0"/>
-              <a:t>2022/12/14</a:t>
+              <a:t>2024/12/15</a:t>
             </a:fld>
             <a:endParaRPr lang="zh-TW" altLang="en-US"/>
           </a:p>
@@ -1464,7 +1464,7 @@
           </a:lstStyle>
           <a:p>
             <a:r>
-              <a:rPr lang="en-US" altLang="zh-TW" smtClean="0"/>
+              <a:rPr lang="en-US" altLang="zh-TW"/>
               <a:t>Click to edit Master title style</a:t>
             </a:r>
             <a:endParaRPr lang="zh-TW" altLang="en-US"/>
@@ -1530,7 +1530,7 @@
           <a:p>
             <a:pPr lvl="0"/>
             <a:r>
-              <a:rPr lang="en-US" altLang="zh-TW" smtClean="0"/>
+              <a:rPr lang="en-US" altLang="zh-TW"/>
               <a:t>Edit Master text styles</a:t>
             </a:r>
           </a:p>
@@ -1586,35 +1586,35 @@
           <a:p>
             <a:pPr lvl="0"/>
             <a:r>
-              <a:rPr lang="en-US" altLang="zh-TW" smtClean="0"/>
+              <a:rPr lang="en-US" altLang="zh-TW"/>
               <a:t>Edit Master text styles</a:t>
             </a:r>
           </a:p>
           <a:p>
             <a:pPr lvl="1"/>
             <a:r>
-              <a:rPr lang="en-US" altLang="zh-TW" smtClean="0"/>
+              <a:rPr lang="en-US" altLang="zh-TW"/>
               <a:t>Second level</a:t>
             </a:r>
           </a:p>
           <a:p>
             <a:pPr lvl="2"/>
             <a:r>
-              <a:rPr lang="en-US" altLang="zh-TW" smtClean="0"/>
+              <a:rPr lang="en-US" altLang="zh-TW"/>
               <a:t>Third level</a:t>
             </a:r>
           </a:p>
           <a:p>
             <a:pPr lvl="3"/>
             <a:r>
-              <a:rPr lang="en-US" altLang="zh-TW" smtClean="0"/>
+              <a:rPr lang="en-US" altLang="zh-TW"/>
               <a:t>Fourth level</a:t>
             </a:r>
           </a:p>
           <a:p>
             <a:pPr lvl="4"/>
             <a:r>
-              <a:rPr lang="en-US" altLang="zh-TW" smtClean="0"/>
+              <a:rPr lang="en-US" altLang="zh-TW"/>
               <a:t>Fifth level</a:t>
             </a:r>
             <a:endParaRPr lang="zh-TW" altLang="en-US"/>
@@ -1680,7 +1680,7 @@
           <a:p>
             <a:pPr lvl="0"/>
             <a:r>
-              <a:rPr lang="en-US" altLang="zh-TW" smtClean="0"/>
+              <a:rPr lang="en-US" altLang="zh-TW"/>
               <a:t>Edit Master text styles</a:t>
             </a:r>
           </a:p>
@@ -1736,35 +1736,35 @@
           <a:p>
             <a:pPr lvl="0"/>
             <a:r>
-              <a:rPr lang="en-US" altLang="zh-TW" smtClean="0"/>
+              <a:rPr lang="en-US" altLang="zh-TW"/>
               <a:t>Edit Master text styles</a:t>
             </a:r>
           </a:p>
           <a:p>
             <a:pPr lvl="1"/>
             <a:r>
-              <a:rPr lang="en-US" altLang="zh-TW" smtClean="0"/>
+              <a:rPr lang="en-US" altLang="zh-TW"/>
               <a:t>Second level</a:t>
             </a:r>
           </a:p>
           <a:p>
             <a:pPr lvl="2"/>
             <a:r>
-              <a:rPr lang="en-US" altLang="zh-TW" smtClean="0"/>
+              <a:rPr lang="en-US" altLang="zh-TW"/>
               <a:t>Third level</a:t>
             </a:r>
           </a:p>
           <a:p>
             <a:pPr lvl="3"/>
             <a:r>
-              <a:rPr lang="en-US" altLang="zh-TW" smtClean="0"/>
+              <a:rPr lang="en-US" altLang="zh-TW"/>
               <a:t>Fourth level</a:t>
             </a:r>
           </a:p>
           <a:p>
             <a:pPr lvl="4"/>
             <a:r>
-              <a:rPr lang="en-US" altLang="zh-TW" smtClean="0"/>
+              <a:rPr lang="en-US" altLang="zh-TW"/>
               <a:t>Fifth level</a:t>
             </a:r>
             <a:endParaRPr lang="zh-TW" altLang="en-US"/>
@@ -1788,7 +1788,7 @@
           <a:p>
             <a:fld id="{EE40A0B7-CDAD-46BA-BE6C-EFC19534B14B}" type="datetimeFigureOut">
               <a:rPr lang="zh-TW" altLang="en-US" smtClean="0"/>
-              <a:t>2022/12/14</a:t>
+              <a:t>2024/12/15</a:t>
             </a:fld>
             <a:endParaRPr lang="zh-TW" altLang="en-US"/>
           </a:p>
@@ -1882,7 +1882,7 @@
           <a:lstStyle/>
           <a:p>
             <a:r>
-              <a:rPr lang="en-US" altLang="zh-TW" smtClean="0"/>
+              <a:rPr lang="en-US" altLang="zh-TW"/>
               <a:t>Click to edit Master title style</a:t>
             </a:r>
             <a:endParaRPr lang="zh-TW" altLang="en-US"/>
@@ -1906,7 +1906,7 @@
           <a:p>
             <a:fld id="{EE40A0B7-CDAD-46BA-BE6C-EFC19534B14B}" type="datetimeFigureOut">
               <a:rPr lang="zh-TW" altLang="en-US" smtClean="0"/>
-              <a:t>2022/12/14</a:t>
+              <a:t>2024/12/15</a:t>
             </a:fld>
             <a:endParaRPr lang="zh-TW" altLang="en-US"/>
           </a:p>
@@ -2001,7 +2001,7 @@
           <a:p>
             <a:fld id="{EE40A0B7-CDAD-46BA-BE6C-EFC19534B14B}" type="datetimeFigureOut">
               <a:rPr lang="zh-TW" altLang="en-US" smtClean="0"/>
-              <a:t>2022/12/14</a:t>
+              <a:t>2024/12/15</a:t>
             </a:fld>
             <a:endParaRPr lang="zh-TW" altLang="en-US"/>
           </a:p>
@@ -2104,7 +2104,7 @@
           </a:lstStyle>
           <a:p>
             <a:r>
-              <a:rPr lang="en-US" altLang="zh-TW" smtClean="0"/>
+              <a:rPr lang="en-US" altLang="zh-TW"/>
               <a:t>Click to edit Master title style</a:t>
             </a:r>
             <a:endParaRPr lang="zh-TW" altLang="en-US"/>
@@ -2161,35 +2161,35 @@
           <a:p>
             <a:pPr lvl="0"/>
             <a:r>
-              <a:rPr lang="en-US" altLang="zh-TW" smtClean="0"/>
+              <a:rPr lang="en-US" altLang="zh-TW"/>
               <a:t>Edit Master text styles</a:t>
             </a:r>
           </a:p>
           <a:p>
             <a:pPr lvl="1"/>
             <a:r>
-              <a:rPr lang="en-US" altLang="zh-TW" smtClean="0"/>
+              <a:rPr lang="en-US" altLang="zh-TW"/>
               <a:t>Second level</a:t>
             </a:r>
           </a:p>
           <a:p>
             <a:pPr lvl="2"/>
             <a:r>
-              <a:rPr lang="en-US" altLang="zh-TW" smtClean="0"/>
+              <a:rPr lang="en-US" altLang="zh-TW"/>
               <a:t>Third level</a:t>
             </a:r>
           </a:p>
           <a:p>
             <a:pPr lvl="3"/>
             <a:r>
-              <a:rPr lang="en-US" altLang="zh-TW" smtClean="0"/>
+              <a:rPr lang="en-US" altLang="zh-TW"/>
               <a:t>Fourth level</a:t>
             </a:r>
           </a:p>
           <a:p>
             <a:pPr lvl="4"/>
             <a:r>
-              <a:rPr lang="en-US" altLang="zh-TW" smtClean="0"/>
+              <a:rPr lang="en-US" altLang="zh-TW"/>
               <a:t>Fifth level</a:t>
             </a:r>
             <a:endParaRPr lang="zh-TW" altLang="en-US"/>
@@ -2255,7 +2255,7 @@
           <a:p>
             <a:pPr lvl="0"/>
             <a:r>
-              <a:rPr lang="en-US" altLang="zh-TW" smtClean="0"/>
+              <a:rPr lang="en-US" altLang="zh-TW"/>
               <a:t>Edit Master text styles</a:t>
             </a:r>
           </a:p>
@@ -2278,7 +2278,7 @@
           <a:p>
             <a:fld id="{EE40A0B7-CDAD-46BA-BE6C-EFC19534B14B}" type="datetimeFigureOut">
               <a:rPr lang="zh-TW" altLang="en-US" smtClean="0"/>
-              <a:t>2022/12/14</a:t>
+              <a:t>2024/12/15</a:t>
             </a:fld>
             <a:endParaRPr lang="zh-TW" altLang="en-US"/>
           </a:p>
@@ -2381,7 +2381,7 @@
           </a:lstStyle>
           <a:p>
             <a:r>
-              <a:rPr lang="en-US" altLang="zh-TW" smtClean="0"/>
+              <a:rPr lang="en-US" altLang="zh-TW"/>
               <a:t>Click to edit Master title style</a:t>
             </a:r>
             <a:endParaRPr lang="zh-TW" altLang="en-US"/>
@@ -2446,7 +2446,7 @@
           </a:lstStyle>
           <a:p>
             <a:r>
-              <a:rPr lang="en-US" altLang="zh-TW" smtClean="0"/>
+              <a:rPr lang="en-US" altLang="zh-TW"/>
               <a:t>Click icon to add picture</a:t>
             </a:r>
             <a:endParaRPr lang="zh-TW" altLang="en-US"/>
@@ -2512,7 +2512,7 @@
           <a:p>
             <a:pPr lvl="0"/>
             <a:r>
-              <a:rPr lang="en-US" altLang="zh-TW" smtClean="0"/>
+              <a:rPr lang="en-US" altLang="zh-TW"/>
               <a:t>Edit Master text styles</a:t>
             </a:r>
           </a:p>
@@ -2535,7 +2535,7 @@
           <a:p>
             <a:fld id="{EE40A0B7-CDAD-46BA-BE6C-EFC19534B14B}" type="datetimeFigureOut">
               <a:rPr lang="zh-TW" altLang="en-US" smtClean="0"/>
-              <a:t>2022/12/14</a:t>
+              <a:t>2024/12/15</a:t>
             </a:fld>
             <a:endParaRPr lang="zh-TW" altLang="en-US"/>
           </a:p>
@@ -2649,10 +2649,9 @@
           <a:lstStyle/>
           <a:p>
             <a:r>
-              <a:rPr lang="zh-TW" altLang="en-US" smtClean="0"/>
+              <a:rPr lang="zh-TW" altLang="en-US"/>
               <a:t>按一下以編輯母片標題樣式</a:t>
             </a:r>
-            <a:endParaRPr lang="zh-TW" altLang="en-US"/>
           </a:p>
         </p:txBody>
       </p:sp>
@@ -2683,38 +2682,37 @@
           <a:p>
             <a:pPr lvl="0"/>
             <a:r>
-              <a:rPr lang="zh-TW" altLang="en-US" smtClean="0"/>
+              <a:rPr lang="zh-TW" altLang="en-US"/>
               <a:t>按一下以編輯母片文字樣式</a:t>
             </a:r>
           </a:p>
           <a:p>
             <a:pPr lvl="1"/>
             <a:r>
-              <a:rPr lang="zh-TW" altLang="en-US" smtClean="0"/>
+              <a:rPr lang="zh-TW" altLang="en-US"/>
               <a:t>第二層</a:t>
             </a:r>
           </a:p>
           <a:p>
             <a:pPr lvl="2"/>
             <a:r>
-              <a:rPr lang="zh-TW" altLang="en-US" smtClean="0"/>
+              <a:rPr lang="zh-TW" altLang="en-US"/>
               <a:t>第三層</a:t>
             </a:r>
           </a:p>
           <a:p>
             <a:pPr lvl="3"/>
             <a:r>
-              <a:rPr lang="zh-TW" altLang="en-US" smtClean="0"/>
+              <a:rPr lang="zh-TW" altLang="en-US"/>
               <a:t>第四層</a:t>
             </a:r>
           </a:p>
           <a:p>
             <a:pPr lvl="4"/>
             <a:r>
-              <a:rPr lang="zh-TW" altLang="en-US" smtClean="0"/>
+              <a:rPr lang="zh-TW" altLang="en-US"/>
               <a:t>第五層</a:t>
             </a:r>
-            <a:endParaRPr lang="zh-TW" altLang="en-US"/>
           </a:p>
         </p:txBody>
       </p:sp>
@@ -2753,7 +2751,7 @@
           <a:p>
             <a:fld id="{EE40A0B7-CDAD-46BA-BE6C-EFC19534B14B}" type="datetimeFigureOut">
               <a:rPr lang="zh-TW" altLang="en-US" smtClean="0"/>
-              <a:t>2022/12/14</a:t>
+              <a:t>2024/12/15</a:t>
             </a:fld>
             <a:endParaRPr lang="zh-TW" altLang="en-US"/>
           </a:p>
@@ -3151,7 +3149,7 @@
           <a:lstStyle/>
           <a:p>
             <a:r>
-              <a:rPr lang="zh-TW" altLang="en-US" sz="7200" b="1" i="1" dirty="0" smtClean="0">
+              <a:rPr lang="zh-TW" altLang="en-US" sz="7200" b="1" i="1" dirty="0">
                 <a:solidFill>
                   <a:srgbClr val="660033"/>
                 </a:solidFill>
@@ -3165,24 +3163,7 @@
                 <a:latin typeface="微軟正黑體" pitchFamily="34" charset="-120"/>
                 <a:ea typeface="微軟正黑體" pitchFamily="34" charset="-120"/>
               </a:rPr>
-              <a:t>最</a:t>
-            </a:r>
-            <a:r>
-              <a:rPr lang="zh-TW" altLang="en-US" sz="7200" b="1" i="1" dirty="0">
-                <a:solidFill>
-                  <a:srgbClr val="660033"/>
-                </a:solidFill>
-                <a:effectLst>
-                  <a:outerShdw blurRad="38100" dist="38100" dir="2700000" algn="tl">
-                    <a:srgbClr val="000000">
-                      <a:alpha val="43137"/>
-                    </a:srgbClr>
-                  </a:outerShdw>
-                </a:effectLst>
-                <a:latin typeface="微軟正黑體" pitchFamily="34" charset="-120"/>
-                <a:ea typeface="微軟正黑體" pitchFamily="34" charset="-120"/>
-              </a:rPr>
-              <a:t>美的禮物</a:t>
+              <a:t>最美的禮物</a:t>
             </a:r>
           </a:p>
         </p:txBody>
@@ -3243,24 +3224,14 @@
               <a:buNone/>
             </a:pPr>
             <a:r>
-              <a:rPr lang="zh-TW" altLang="en-US" sz="6400" b="1" dirty="0" smtClean="0">
+              <a:rPr lang="zh-TW" altLang="en-US" sz="6400" b="1" dirty="0">
                 <a:solidFill>
                   <a:srgbClr val="660033"/>
                 </a:solidFill>
                 <a:latin typeface="微軟正黑體" pitchFamily="34" charset="-120"/>
                 <a:ea typeface="微軟正黑體" pitchFamily="34" charset="-120"/>
               </a:rPr>
-              <a:t>綠</a:t>
-            </a:r>
-            <a:r>
-              <a:rPr lang="zh-TW" altLang="en-US" sz="6400" b="1" dirty="0">
-                <a:solidFill>
-                  <a:srgbClr val="660033"/>
-                </a:solidFill>
-                <a:latin typeface="微軟正黑體" pitchFamily="34" charset="-120"/>
-                <a:ea typeface="微軟正黑體" pitchFamily="34" charset="-120"/>
-              </a:rPr>
-              <a:t>色樹下 堆滿禮物 </a:t>
+              <a:t>綠色樹下 堆滿禮物 </a:t>
             </a:r>
             <a:endParaRPr lang="en-US" altLang="zh-TW" sz="6400" b="1" dirty="0">
               <a:solidFill>
@@ -3335,7 +3306,7 @@
                 <a:latin typeface="Microsoft JhengHei" panose="020B0604030504040204" pitchFamily="34" charset="-120"/>
                 <a:ea typeface="Microsoft JhengHei" panose="020B0604030504040204" pitchFamily="34" charset="-120"/>
               </a:rPr>
-              <a:t>正</a:t>
+              <a:t>正歌</a:t>
             </a:r>
             <a:r>
               <a:rPr lang="en-US" sz="4000" b="1" dirty="0">
@@ -3487,7 +3458,7 @@
                 <a:latin typeface="Microsoft JhengHei" panose="020B0604030504040204" pitchFamily="34" charset="-120"/>
                 <a:ea typeface="Microsoft JhengHei" panose="020B0604030504040204" pitchFamily="34" charset="-120"/>
               </a:rPr>
-              <a:t>正</a:t>
+              <a:t>正歌</a:t>
             </a:r>
             <a:r>
               <a:rPr lang="en-US" sz="4000" b="1" dirty="0">
@@ -3571,27 +3542,7 @@
                 <a:latin typeface="微軟正黑體" pitchFamily="34" charset="-120"/>
                 <a:ea typeface="微軟正黑體" pitchFamily="34" charset="-120"/>
               </a:rPr>
-              <a:t>愛我們</a:t>
-            </a:r>
-            <a:r>
-              <a:rPr lang="zh-TW" altLang="en-US" sz="6400" b="1" dirty="0">
-                <a:solidFill>
-                  <a:srgbClr val="660033"/>
-                </a:solidFill>
-                <a:latin typeface="微軟正黑體" pitchFamily="34" charset="-120"/>
-                <a:ea typeface="微軟正黑體" pitchFamily="34" charset="-120"/>
-              </a:rPr>
-              <a:t>的阿</a:t>
-            </a:r>
-            <a:r>
-              <a:rPr lang="zh-TW" altLang="en-US" sz="6400" b="1" dirty="0">
-                <a:solidFill>
-                  <a:srgbClr val="660033"/>
-                </a:solidFill>
-                <a:latin typeface="微軟正黑體" pitchFamily="34" charset="-120"/>
-                <a:ea typeface="微軟正黑體" pitchFamily="34" charset="-120"/>
-              </a:rPr>
-              <a:t>爸天父 </a:t>
+              <a:t>愛我們的阿爸天父 </a:t>
             </a:r>
             <a:endParaRPr lang="en-US" altLang="zh-TW" sz="6400" b="1" dirty="0">
               <a:solidFill>
@@ -3666,7 +3617,7 @@
                 <a:latin typeface="Microsoft JhengHei" panose="020B0604030504040204" pitchFamily="34" charset="-120"/>
                 <a:ea typeface="Microsoft JhengHei" panose="020B0604030504040204" pitchFamily="34" charset="-120"/>
               </a:rPr>
-              <a:t>正</a:t>
+              <a:t>正歌</a:t>
             </a:r>
             <a:r>
               <a:rPr lang="en-US" sz="4000" b="1" dirty="0">
@@ -3750,27 +3701,7 @@
                 <a:latin typeface="微軟正黑體" pitchFamily="34" charset="-120"/>
                 <a:ea typeface="微軟正黑體" pitchFamily="34" charset="-120"/>
               </a:rPr>
-              <a:t>祂的降臨揭開</a:t>
-            </a:r>
-            <a:r>
-              <a:rPr lang="zh-TW" altLang="en-US" sz="6400" b="1" dirty="0">
-                <a:solidFill>
-                  <a:srgbClr val="660033"/>
-                </a:solidFill>
-                <a:latin typeface="微軟正黑體" pitchFamily="34" charset="-120"/>
-                <a:ea typeface="微軟正黑體" pitchFamily="34" charset="-120"/>
-              </a:rPr>
-              <a:t>了  救</a:t>
-            </a:r>
-            <a:r>
-              <a:rPr lang="zh-TW" altLang="en-US" sz="6400" b="1" dirty="0">
-                <a:solidFill>
-                  <a:srgbClr val="660033"/>
-                </a:solidFill>
-                <a:latin typeface="微軟正黑體" pitchFamily="34" charset="-120"/>
-                <a:ea typeface="微軟正黑體" pitchFamily="34" charset="-120"/>
-              </a:rPr>
-              <a:t>恩的序幕 </a:t>
+              <a:t>祂的降臨揭開了  救恩的序幕 </a:t>
             </a:r>
             <a:endParaRPr lang="en-US" altLang="zh-TW" sz="6400" b="1" dirty="0">
               <a:solidFill>
@@ -3838,7 +3769,7 @@
                 <a:latin typeface="Microsoft JhengHei" panose="020B0604030504040204" pitchFamily="34" charset="-120"/>
                 <a:ea typeface="Microsoft JhengHei" panose="020B0604030504040204" pitchFamily="34" charset="-120"/>
               </a:rPr>
-              <a:t>正</a:t>
+              <a:t>正歌</a:t>
             </a:r>
             <a:r>
               <a:rPr lang="en-US" sz="4000" b="1" dirty="0">
@@ -3922,27 +3853,7 @@
                 <a:latin typeface="微軟正黑體" pitchFamily="34" charset="-120"/>
                 <a:ea typeface="微軟正黑體" pitchFamily="34" charset="-120"/>
               </a:rPr>
-              <a:t>叮叮噹 </a:t>
-            </a:r>
-            <a:r>
-              <a:rPr lang="zh-TW" altLang="en-US" sz="6400" b="1" dirty="0">
-                <a:solidFill>
-                  <a:srgbClr val="660033"/>
-                </a:solidFill>
-                <a:latin typeface="微軟正黑體" pitchFamily="34" charset="-120"/>
-                <a:ea typeface="微軟正黑體" pitchFamily="34" charset="-120"/>
-              </a:rPr>
-              <a:t> 叮</a:t>
-            </a:r>
-            <a:r>
-              <a:rPr lang="zh-TW" altLang="en-US" sz="6400" b="1" dirty="0">
-                <a:solidFill>
-                  <a:srgbClr val="660033"/>
-                </a:solidFill>
-                <a:latin typeface="微軟正黑體" pitchFamily="34" charset="-120"/>
-                <a:ea typeface="微軟正黑體" pitchFamily="34" charset="-120"/>
-              </a:rPr>
-              <a:t>叮噹 </a:t>
+              <a:t>叮叮噹  叮叮噹 </a:t>
             </a:r>
             <a:endParaRPr lang="en-US" altLang="zh-TW" sz="6400" b="1" dirty="0">
               <a:solidFill>
@@ -4003,34 +3914,24 @@
               <a:t>( </a:t>
             </a:r>
             <a:r>
-              <a:rPr lang="zh-CN" altLang="en-US" sz="4000" b="1" dirty="0" smtClean="0">
+              <a:rPr lang="zh-CN" altLang="en-US" sz="4000" b="1" dirty="0">
                 <a:solidFill>
                   <a:srgbClr val="660033"/>
                 </a:solidFill>
                 <a:latin typeface="Microsoft JhengHei" panose="020B0604030504040204" pitchFamily="34" charset="-120"/>
                 <a:ea typeface="Microsoft JhengHei" panose="020B0604030504040204" pitchFamily="34" charset="-120"/>
               </a:rPr>
-              <a:t>副</a:t>
-            </a:r>
-            <a:r>
-              <a:rPr lang="en-US" sz="4000" b="1" dirty="0" smtClean="0">
+              <a:t>副歌</a:t>
+            </a:r>
+            <a:r>
+              <a:rPr lang="en-US" sz="4000" b="1" dirty="0">
                 <a:solidFill>
                   <a:srgbClr val="660033"/>
                 </a:solidFill>
                 <a:latin typeface="Microsoft JhengHei" panose="020B0604030504040204" pitchFamily="34" charset="-120"/>
                 <a:ea typeface="Microsoft JhengHei" panose="020B0604030504040204" pitchFamily="34" charset="-120"/>
               </a:rPr>
-              <a:t> </a:t>
-            </a:r>
-            <a:r>
-              <a:rPr lang="en-US" sz="4000" b="1" dirty="0">
-                <a:solidFill>
-                  <a:srgbClr val="660033"/>
-                </a:solidFill>
-                <a:latin typeface="Microsoft JhengHei" panose="020B0604030504040204" pitchFamily="34" charset="-120"/>
-                <a:ea typeface="Microsoft JhengHei" panose="020B0604030504040204" pitchFamily="34" charset="-120"/>
-              </a:rPr>
-              <a:t>)</a:t>
+              <a:t> )</a:t>
             </a:r>
             <a:endParaRPr lang="vi-VN" sz="4000" b="1" dirty="0">
               <a:solidFill>
@@ -4165,34 +4066,24 @@
               <a:t>( </a:t>
             </a:r>
             <a:r>
-              <a:rPr lang="zh-CN" altLang="en-US" sz="4000" b="1" dirty="0" smtClean="0">
+              <a:rPr lang="zh-CN" altLang="en-US" sz="4000" b="1" dirty="0">
                 <a:solidFill>
                   <a:srgbClr val="660033"/>
                 </a:solidFill>
                 <a:latin typeface="Microsoft JhengHei" panose="020B0604030504040204" pitchFamily="34" charset="-120"/>
                 <a:ea typeface="Microsoft JhengHei" panose="020B0604030504040204" pitchFamily="34" charset="-120"/>
               </a:rPr>
-              <a:t>副</a:t>
-            </a:r>
-            <a:r>
-              <a:rPr lang="en-US" sz="4000" b="1" dirty="0" smtClean="0">
+              <a:t>副歌</a:t>
+            </a:r>
+            <a:r>
+              <a:rPr lang="en-US" sz="4000" b="1" dirty="0">
                 <a:solidFill>
                   <a:srgbClr val="660033"/>
                 </a:solidFill>
                 <a:latin typeface="Microsoft JhengHei" panose="020B0604030504040204" pitchFamily="34" charset="-120"/>
                 <a:ea typeface="Microsoft JhengHei" panose="020B0604030504040204" pitchFamily="34" charset="-120"/>
               </a:rPr>
-              <a:t> </a:t>
-            </a:r>
-            <a:r>
-              <a:rPr lang="en-US" sz="4000" b="1" dirty="0">
-                <a:solidFill>
-                  <a:srgbClr val="660033"/>
-                </a:solidFill>
-                <a:latin typeface="Microsoft JhengHei" panose="020B0604030504040204" pitchFamily="34" charset="-120"/>
-                <a:ea typeface="Microsoft JhengHei" panose="020B0604030504040204" pitchFamily="34" charset="-120"/>
-              </a:rPr>
-              <a:t>)</a:t>
+              <a:t> )</a:t>
             </a:r>
             <a:endParaRPr lang="vi-VN" sz="4000" b="1" dirty="0">
               <a:solidFill>
@@ -4266,27 +4157,7 @@
                 <a:latin typeface="微軟正黑體" pitchFamily="34" charset="-120"/>
                 <a:ea typeface="微軟正黑體" pitchFamily="34" charset="-120"/>
               </a:rPr>
-              <a:t>叮叮噹 </a:t>
-            </a:r>
-            <a:r>
-              <a:rPr lang="zh-TW" altLang="en-US" sz="6400" b="1" dirty="0">
-                <a:solidFill>
-                  <a:srgbClr val="660033"/>
-                </a:solidFill>
-                <a:latin typeface="微軟正黑體" pitchFamily="34" charset="-120"/>
-                <a:ea typeface="微軟正黑體" pitchFamily="34" charset="-120"/>
-              </a:rPr>
-              <a:t> 叮</a:t>
-            </a:r>
-            <a:r>
-              <a:rPr lang="zh-TW" altLang="en-US" sz="6400" b="1" dirty="0">
-                <a:solidFill>
-                  <a:srgbClr val="660033"/>
-                </a:solidFill>
-                <a:latin typeface="微軟正黑體" pitchFamily="34" charset="-120"/>
-                <a:ea typeface="微軟正黑體" pitchFamily="34" charset="-120"/>
-              </a:rPr>
-              <a:t>叮噹 </a:t>
+              <a:t>叮叮噹  叮叮噹 </a:t>
             </a:r>
             <a:endParaRPr lang="en-US" altLang="zh-TW" sz="6400" b="1" dirty="0">
               <a:solidFill>
@@ -4347,34 +4218,24 @@
               <a:t>( </a:t>
             </a:r>
             <a:r>
-              <a:rPr lang="zh-CN" altLang="en-US" sz="4000" b="1" dirty="0" smtClean="0">
+              <a:rPr lang="zh-CN" altLang="en-US" sz="4000" b="1" dirty="0">
                 <a:solidFill>
                   <a:srgbClr val="660033"/>
                 </a:solidFill>
                 <a:latin typeface="Microsoft JhengHei" panose="020B0604030504040204" pitchFamily="34" charset="-120"/>
                 <a:ea typeface="Microsoft JhengHei" panose="020B0604030504040204" pitchFamily="34" charset="-120"/>
               </a:rPr>
-              <a:t>副</a:t>
-            </a:r>
-            <a:r>
-              <a:rPr lang="en-US" sz="4000" b="1" dirty="0" smtClean="0">
+              <a:t>副歌</a:t>
+            </a:r>
+            <a:r>
+              <a:rPr lang="en-US" sz="4000" b="1" dirty="0">
                 <a:solidFill>
                   <a:srgbClr val="660033"/>
                 </a:solidFill>
                 <a:latin typeface="Microsoft JhengHei" panose="020B0604030504040204" pitchFamily="34" charset="-120"/>
                 <a:ea typeface="Microsoft JhengHei" panose="020B0604030504040204" pitchFamily="34" charset="-120"/>
               </a:rPr>
-              <a:t> </a:t>
-            </a:r>
-            <a:r>
-              <a:rPr lang="en-US" sz="4000" b="1" dirty="0">
-                <a:solidFill>
-                  <a:srgbClr val="660033"/>
-                </a:solidFill>
-                <a:latin typeface="Microsoft JhengHei" panose="020B0604030504040204" pitchFamily="34" charset="-120"/>
-                <a:ea typeface="Microsoft JhengHei" panose="020B0604030504040204" pitchFamily="34" charset="-120"/>
-              </a:rPr>
-              <a:t>)</a:t>
+              <a:t> )</a:t>
             </a:r>
             <a:endParaRPr lang="vi-VN" sz="4000" b="1" dirty="0">
               <a:solidFill>
@@ -4509,34 +4370,24 @@
               <a:t>( </a:t>
             </a:r>
             <a:r>
-              <a:rPr lang="zh-CN" altLang="en-US" sz="4000" b="1" dirty="0" smtClean="0">
+              <a:rPr lang="zh-CN" altLang="en-US" sz="4000" b="1" dirty="0">
                 <a:solidFill>
                   <a:srgbClr val="660033"/>
                 </a:solidFill>
                 <a:latin typeface="Microsoft JhengHei" panose="020B0604030504040204" pitchFamily="34" charset="-120"/>
                 <a:ea typeface="Microsoft JhengHei" panose="020B0604030504040204" pitchFamily="34" charset="-120"/>
               </a:rPr>
-              <a:t>副</a:t>
-            </a:r>
-            <a:r>
-              <a:rPr lang="en-US" sz="4000" b="1" dirty="0" smtClean="0">
+              <a:t>副歌</a:t>
+            </a:r>
+            <a:r>
+              <a:rPr lang="en-US" sz="4000" b="1" dirty="0">
                 <a:solidFill>
                   <a:srgbClr val="660033"/>
                 </a:solidFill>
                 <a:latin typeface="Microsoft JhengHei" panose="020B0604030504040204" pitchFamily="34" charset="-120"/>
                 <a:ea typeface="Microsoft JhengHei" panose="020B0604030504040204" pitchFamily="34" charset="-120"/>
               </a:rPr>
-              <a:t> </a:t>
-            </a:r>
-            <a:r>
-              <a:rPr lang="en-US" sz="4000" b="1" dirty="0">
-                <a:solidFill>
-                  <a:srgbClr val="660033"/>
-                </a:solidFill>
-                <a:latin typeface="Microsoft JhengHei" panose="020B0604030504040204" pitchFamily="34" charset="-120"/>
-                <a:ea typeface="Microsoft JhengHei" panose="020B0604030504040204" pitchFamily="34" charset="-120"/>
-              </a:rPr>
-              <a:t>)</a:t>
+              <a:t> )</a:t>
             </a:r>
             <a:endParaRPr lang="vi-VN" sz="4000" b="1" dirty="0">
               <a:solidFill>
